--- a/4 - Intent/Intent.pptx
+++ b/4 - Intent/Intent.pptx
@@ -29520,10 +29520,10 @@
               <a:buNone/>
             </a:pPr>
             <a:r>
-              <a:rPr lang="en"/>
-              <a:t>Activities and Intents</a:t>
-            </a:r>
-            <a:endParaRPr/>
+              <a:rPr lang="en" dirty="0"/>
+              <a:t>Intent</a:t>
+            </a:r>
+            <a:endParaRPr dirty="0"/>
           </a:p>
         </p:txBody>
       </p:sp>
@@ -33780,10 +33780,10 @@
               <a:buNone/>
             </a:pPr>
             <a:r>
-              <a:rPr lang="en"/>
-              <a:t>2.1 Activities and Intents</a:t>
-            </a:r>
-            <a:endParaRPr/>
+              <a:rPr lang="en" dirty="0"/>
+              <a:t>Intents</a:t>
+            </a:r>
+            <a:endParaRPr dirty="0"/>
           </a:p>
         </p:txBody>
       </p:sp>
@@ -47626,26 +47626,6 @@
 </file>
 
 <file path=customXml/item1.xml><?xml version="1.0" encoding="utf-8"?>
-<?mso-contentType ?>
-<FormTemplates xmlns="http://schemas.microsoft.com/sharepoint/v3/contenttype/forms">
-  <Display>DocumentLibraryForm</Display>
-  <Edit>DocumentLibraryForm</Edit>
-  <New>DocumentLibraryForm</New>
-</FormTemplates>
-</file>
-
-<file path=customXml/item2.xml><?xml version="1.0" encoding="utf-8"?>
-<p:properties xmlns:p="http://schemas.microsoft.com/office/2006/metadata/properties" xmlns:xsi="http://www.w3.org/2001/XMLSchema-instance" xmlns:pc="http://schemas.microsoft.com/office/infopath/2007/PartnerControls">
-  <documentManagement>
-    <TaxCatchAll xmlns="6de439ce-b7a3-4fe1-9235-7bacf5677901" xsi:nil="true"/>
-    <lcf76f155ced4ddcb4097134ff3c332f xmlns="9a780629-4d19-4bb9-9056-9a589cd4d271">
-      <Terms xmlns="http://schemas.microsoft.com/office/infopath/2007/PartnerControls"/>
-    </lcf76f155ced4ddcb4097134ff3c332f>
-  </documentManagement>
-</p:properties>
-</file>
-
-<file path=customXml/item3.xml><?xml version="1.0" encoding="utf-8"?>
 <ct:contentTypeSchema xmlns:ct="http://schemas.microsoft.com/office/2006/metadata/contentType" xmlns:ma="http://schemas.microsoft.com/office/2006/metadata/properties/metaAttributes" ct:_="" ma:_="" ma:contentTypeName="Document" ma:contentTypeID="0x0101000BE22A5FA3A2044CB9CD88DCBEA97603" ma:contentTypeVersion="14" ma:contentTypeDescription="Create a new document." ma:contentTypeScope="" ma:versionID="add9614137543b78dcbd012fba14612c">
   <xsd:schema xmlns:xsd="http://www.w3.org/2001/XMLSchema" xmlns:xs="http://www.w3.org/2001/XMLSchema" xmlns:p="http://schemas.microsoft.com/office/2006/metadata/properties" xmlns:ns2="9a780629-4d19-4bb9-9056-9a589cd4d271" xmlns:ns3="6de439ce-b7a3-4fe1-9235-7bacf5677901" targetNamespace="http://schemas.microsoft.com/office/2006/metadata/properties" ma:root="true" ma:fieldsID="ff15d42874a67466ae73f4094a57046d" ns2:_="" ns3:_="">
     <xsd:import namespace="9a780629-4d19-4bb9-9056-9a589cd4d271"/>
@@ -47874,26 +47854,27 @@
 </ct:contentTypeSchema>
 </file>
 
-<file path=customXml/itemProps1.xml><?xml version="1.0" encoding="utf-8"?>
-<ds:datastoreItem xmlns:ds="http://schemas.openxmlformats.org/officeDocument/2006/customXml" ds:itemID="{1D86C682-4AFF-4BAF-89CB-3E384EAB8F92}">
-  <ds:schemaRefs>
-    <ds:schemaRef ds:uri="http://schemas.microsoft.com/sharepoint/v3/contenttype/forms"/>
-  </ds:schemaRefs>
-</ds:datastoreItem>
+<file path=customXml/item2.xml><?xml version="1.0" encoding="utf-8"?>
+<?mso-contentType ?>
+<FormTemplates xmlns="http://schemas.microsoft.com/sharepoint/v3/contenttype/forms">
+  <Display>DocumentLibraryForm</Display>
+  <Edit>DocumentLibraryForm</Edit>
+  <New>DocumentLibraryForm</New>
+</FormTemplates>
 </file>
 
-<file path=customXml/itemProps2.xml><?xml version="1.0" encoding="utf-8"?>
-<ds:datastoreItem xmlns:ds="http://schemas.openxmlformats.org/officeDocument/2006/customXml" ds:itemID="{3C9D2C64-633B-43FC-BB88-A88B446FB994}">
-  <ds:schemaRefs>
-    <ds:schemaRef ds:uri="http://schemas.microsoft.com/office/2006/metadata/properties"/>
-    <ds:schemaRef ds:uri="http://schemas.microsoft.com/office/infopath/2007/PartnerControls"/>
-    <ds:schemaRef ds:uri="6de439ce-b7a3-4fe1-9235-7bacf5677901"/>
-    <ds:schemaRef ds:uri="9a780629-4d19-4bb9-9056-9a589cd4d271"/>
-  </ds:schemaRefs>
-</ds:datastoreItem>
+<file path=customXml/item3.xml><?xml version="1.0" encoding="utf-8"?>
+<p:properties xmlns:p="http://schemas.microsoft.com/office/2006/metadata/properties" xmlns:xsi="http://www.w3.org/2001/XMLSchema-instance" xmlns:pc="http://schemas.microsoft.com/office/infopath/2007/PartnerControls">
+  <documentManagement>
+    <TaxCatchAll xmlns="6de439ce-b7a3-4fe1-9235-7bacf5677901" xsi:nil="true"/>
+    <lcf76f155ced4ddcb4097134ff3c332f xmlns="9a780629-4d19-4bb9-9056-9a589cd4d271">
+      <Terms xmlns="http://schemas.microsoft.com/office/infopath/2007/PartnerControls"/>
+    </lcf76f155ced4ddcb4097134ff3c332f>
+  </documentManagement>
+</p:properties>
 </file>
 
-<file path=customXml/itemProps3.xml><?xml version="1.0" encoding="utf-8"?>
+<file path=customXml/itemProps1.xml><?xml version="1.0" encoding="utf-8"?>
 <ds:datastoreItem xmlns:ds="http://schemas.openxmlformats.org/officeDocument/2006/customXml" ds:itemID="{66806924-3F66-495A-A8C7-976E929A039D}">
   <ds:schemaRefs>
     <ds:schemaRef ds:uri="http://schemas.microsoft.com/office/2006/metadata/contentType"/>
@@ -47910,4 +47891,23 @@
     <ds:schemaRef ds:uri="http://schemas.microsoft.com/internal/obd"/>
   </ds:schemaRefs>
 </ds:datastoreItem>
+</file>
+
+<file path=customXml/itemProps2.xml><?xml version="1.0" encoding="utf-8"?>
+<ds:datastoreItem xmlns:ds="http://schemas.openxmlformats.org/officeDocument/2006/customXml" ds:itemID="{1D86C682-4AFF-4BAF-89CB-3E384EAB8F92}">
+  <ds:schemaRefs>
+    <ds:schemaRef ds:uri="http://schemas.microsoft.com/sharepoint/v3/contenttype/forms"/>
+  </ds:schemaRefs>
+</ds:datastoreItem>
+</file>
+
+<file path=customXml/itemProps3.xml><?xml version="1.0" encoding="utf-8"?>
+<ds:datastoreItem xmlns:ds="http://schemas.openxmlformats.org/officeDocument/2006/customXml" ds:itemID="{3C9D2C64-633B-43FC-BB88-A88B446FB994}">
+  <ds:schemaRefs>
+    <ds:schemaRef ds:uri="http://schemas.microsoft.com/office/2006/metadata/properties"/>
+    <ds:schemaRef ds:uri="http://schemas.microsoft.com/office/infopath/2007/PartnerControls"/>
+    <ds:schemaRef ds:uri="6de439ce-b7a3-4fe1-9235-7bacf5677901"/>
+    <ds:schemaRef ds:uri="9a780629-4d19-4bb9-9056-9a589cd4d271"/>
+  </ds:schemaRefs>
+</ds:datastoreItem>
 </file>